--- a/AgenticAI/6-hands-on/Simple_AI_Agent_for_Data_Analysis-ReAct-DataframeAgent/README-Langchain-Setup-Installation.pptx
+++ b/AgenticAI/6-hands-on/Simple_AI_Agent_for_Data_Analysis-ReAct-DataframeAgent/README-Langchain-Setup-Installation.pptx
@@ -220,7 +220,7 @@
           <a:p>
             <a:fld id="{7BAEECA8-D063-486F-AE31-5020270C1449}" type="datetimeFigureOut">
               <a:rPr lang="en-US" smtClean="0"/>
-              <a:t>3/29/2026</a:t>
+              <a:t>5/7/2026</a:t>
             </a:fld>
             <a:endParaRPr lang="en-US"/>
           </a:p>
@@ -397,7 +397,7 @@
           <a:p>
             <a:fld id="{CB233BD1-3BA8-448D-9D08-7846095EA517}" type="datetimeFigureOut">
               <a:rPr lang="en-US" smtClean="0"/>
-              <a:t>3/29/2026</a:t>
+              <a:t>5/7/2026</a:t>
             </a:fld>
             <a:endParaRPr lang="en-US"/>
           </a:p>
@@ -811,7 +811,7 @@
           <a:p>
             <a:fld id="{6383FAE1-13DE-4511-8C1B-C8AFB720664C}" type="datetimeFigureOut">
               <a:rPr lang="en-US" smtClean="0"/>
-              <a:t>3/29/2026</a:t>
+              <a:t>5/7/2026</a:t>
             </a:fld>
             <a:endParaRPr lang="en-US"/>
           </a:p>
@@ -1009,7 +1009,7 @@
           <a:p>
             <a:fld id="{6383FAE1-13DE-4511-8C1B-C8AFB720664C}" type="datetimeFigureOut">
               <a:rPr lang="en-US" smtClean="0"/>
-              <a:t>3/29/2026</a:t>
+              <a:t>5/7/2026</a:t>
             </a:fld>
             <a:endParaRPr lang="en-US"/>
           </a:p>
@@ -1217,7 +1217,7 @@
           <a:p>
             <a:fld id="{6383FAE1-13DE-4511-8C1B-C8AFB720664C}" type="datetimeFigureOut">
               <a:rPr lang="en-US" smtClean="0"/>
-              <a:t>3/29/2026</a:t>
+              <a:t>5/7/2026</a:t>
             </a:fld>
             <a:endParaRPr lang="en-US"/>
           </a:p>
@@ -1415,7 +1415,7 @@
           <a:p>
             <a:fld id="{6383FAE1-13DE-4511-8C1B-C8AFB720664C}" type="datetimeFigureOut">
               <a:rPr lang="en-US" smtClean="0"/>
-              <a:t>3/29/2026</a:t>
+              <a:t>5/7/2026</a:t>
             </a:fld>
             <a:endParaRPr lang="en-US"/>
           </a:p>
@@ -1690,7 +1690,7 @@
           <a:p>
             <a:fld id="{6383FAE1-13DE-4511-8C1B-C8AFB720664C}" type="datetimeFigureOut">
               <a:rPr lang="en-US" smtClean="0"/>
-              <a:t>3/29/2026</a:t>
+              <a:t>5/7/2026</a:t>
             </a:fld>
             <a:endParaRPr lang="en-US"/>
           </a:p>
@@ -1955,7 +1955,7 @@
           <a:p>
             <a:fld id="{6383FAE1-13DE-4511-8C1B-C8AFB720664C}" type="datetimeFigureOut">
               <a:rPr lang="en-US" smtClean="0"/>
-              <a:t>3/29/2026</a:t>
+              <a:t>5/7/2026</a:t>
             </a:fld>
             <a:endParaRPr lang="en-US"/>
           </a:p>
@@ -2367,7 +2367,7 @@
           <a:p>
             <a:fld id="{6383FAE1-13DE-4511-8C1B-C8AFB720664C}" type="datetimeFigureOut">
               <a:rPr lang="en-US" smtClean="0"/>
-              <a:t>3/29/2026</a:t>
+              <a:t>5/7/2026</a:t>
             </a:fld>
             <a:endParaRPr lang="en-US"/>
           </a:p>
@@ -2508,7 +2508,7 @@
           <a:p>
             <a:fld id="{6383FAE1-13DE-4511-8C1B-C8AFB720664C}" type="datetimeFigureOut">
               <a:rPr lang="en-US" smtClean="0"/>
-              <a:t>3/29/2026</a:t>
+              <a:t>5/7/2026</a:t>
             </a:fld>
             <a:endParaRPr lang="en-US"/>
           </a:p>
@@ -2621,7 +2621,7 @@
           <a:p>
             <a:fld id="{6383FAE1-13DE-4511-8C1B-C8AFB720664C}" type="datetimeFigureOut">
               <a:rPr lang="en-US" smtClean="0"/>
-              <a:t>3/29/2026</a:t>
+              <a:t>5/7/2026</a:t>
             </a:fld>
             <a:endParaRPr lang="en-US"/>
           </a:p>
@@ -2932,7 +2932,7 @@
           <a:p>
             <a:fld id="{6383FAE1-13DE-4511-8C1B-C8AFB720664C}" type="datetimeFigureOut">
               <a:rPr lang="en-US" smtClean="0"/>
-              <a:t>3/29/2026</a:t>
+              <a:t>5/7/2026</a:t>
             </a:fld>
             <a:endParaRPr lang="en-US"/>
           </a:p>
@@ -3223,7 +3223,7 @@
           <a:p>
             <a:fld id="{6383FAE1-13DE-4511-8C1B-C8AFB720664C}" type="datetimeFigureOut">
               <a:rPr lang="en-US" smtClean="0"/>
-              <a:t>3/29/2026</a:t>
+              <a:t>5/7/2026</a:t>
             </a:fld>
             <a:endParaRPr lang="en-US"/>
           </a:p>
@@ -3467,7 +3467,7 @@
           <a:p>
             <a:fld id="{6383FAE1-13DE-4511-8C1B-C8AFB720664C}" type="datetimeFigureOut">
               <a:rPr lang="en-US" smtClean="0"/>
-              <a:t>3/29/2026</a:t>
+              <a:t>5/7/2026</a:t>
             </a:fld>
             <a:endParaRPr lang="en-US"/>
           </a:p>
@@ -4077,7 +4077,7 @@
                   </a:schemeClr>
                 </a:solidFill>
               </a:rPr>
-              <a:t>Langchain</a:t>
+              <a:t>LangChain</a:t>
             </a:r>
             <a:endParaRPr lang="en-US" sz="4000" b="1" dirty="0">
               <a:solidFill>

--- a/AgenticAI/6-hands-on/Simple_AI_Agent_for_Data_Analysis-ReAct-DataframeAgent/README-Langchain-Setup-Installation.pptx
+++ b/AgenticAI/6-hands-on/Simple_AI_Agent_for_Data_Analysis-ReAct-DataframeAgent/README-Langchain-Setup-Installation.pptx
@@ -5,18 +5,22 @@
     <p:sldMasterId id="2147483648" r:id="rId1"/>
   </p:sldMasterIdLst>
   <p:notesMasterIdLst>
-    <p:notesMasterId r:id="rId8"/>
+    <p:notesMasterId r:id="rId12"/>
   </p:notesMasterIdLst>
   <p:handoutMasterIdLst>
-    <p:handoutMasterId r:id="rId9"/>
+    <p:handoutMasterId r:id="rId13"/>
   </p:handoutMasterIdLst>
   <p:sldIdLst>
     <p:sldId id="257" r:id="rId2"/>
     <p:sldId id="276" r:id="rId3"/>
-    <p:sldId id="278" r:id="rId4"/>
-    <p:sldId id="279" r:id="rId5"/>
+    <p:sldId id="279" r:id="rId4"/>
+    <p:sldId id="278" r:id="rId5"/>
     <p:sldId id="275" r:id="rId6"/>
-    <p:sldId id="280" r:id="rId7"/>
+    <p:sldId id="281" r:id="rId7"/>
+    <p:sldId id="282" r:id="rId8"/>
+    <p:sldId id="283" r:id="rId9"/>
+    <p:sldId id="284" r:id="rId10"/>
+    <p:sldId id="280" r:id="rId11"/>
   </p:sldIdLst>
   <p:sldSz cx="12192000" cy="6858000"/>
   <p:notesSz cx="6858000" cy="9144000"/>
@@ -220,7 +224,7 @@
           <a:p>
             <a:fld id="{7BAEECA8-D063-486F-AE31-5020270C1449}" type="datetimeFigureOut">
               <a:rPr lang="en-US" smtClean="0"/>
-              <a:t>5/7/2026</a:t>
+              <a:t>6/13/2026</a:t>
             </a:fld>
             <a:endParaRPr lang="en-US"/>
           </a:p>
@@ -397,7 +401,7 @@
           <a:p>
             <a:fld id="{CB233BD1-3BA8-448D-9D08-7846095EA517}" type="datetimeFigureOut">
               <a:rPr lang="en-US" smtClean="0"/>
-              <a:t>5/7/2026</a:t>
+              <a:t>6/13/2026</a:t>
             </a:fld>
             <a:endParaRPr lang="en-US"/>
           </a:p>
@@ -811,7 +815,7 @@
           <a:p>
             <a:fld id="{6383FAE1-13DE-4511-8C1B-C8AFB720664C}" type="datetimeFigureOut">
               <a:rPr lang="en-US" smtClean="0"/>
-              <a:t>5/7/2026</a:t>
+              <a:t>6/13/2026</a:t>
             </a:fld>
             <a:endParaRPr lang="en-US"/>
           </a:p>
@@ -1009,7 +1013,7 @@
           <a:p>
             <a:fld id="{6383FAE1-13DE-4511-8C1B-C8AFB720664C}" type="datetimeFigureOut">
               <a:rPr lang="en-US" smtClean="0"/>
-              <a:t>5/7/2026</a:t>
+              <a:t>6/13/2026</a:t>
             </a:fld>
             <a:endParaRPr lang="en-US"/>
           </a:p>
@@ -1217,7 +1221,7 @@
           <a:p>
             <a:fld id="{6383FAE1-13DE-4511-8C1B-C8AFB720664C}" type="datetimeFigureOut">
               <a:rPr lang="en-US" smtClean="0"/>
-              <a:t>5/7/2026</a:t>
+              <a:t>6/13/2026</a:t>
             </a:fld>
             <a:endParaRPr lang="en-US"/>
           </a:p>
@@ -1415,7 +1419,7 @@
           <a:p>
             <a:fld id="{6383FAE1-13DE-4511-8C1B-C8AFB720664C}" type="datetimeFigureOut">
               <a:rPr lang="en-US" smtClean="0"/>
-              <a:t>5/7/2026</a:t>
+              <a:t>6/13/2026</a:t>
             </a:fld>
             <a:endParaRPr lang="en-US"/>
           </a:p>
@@ -1690,7 +1694,7 @@
           <a:p>
             <a:fld id="{6383FAE1-13DE-4511-8C1B-C8AFB720664C}" type="datetimeFigureOut">
               <a:rPr lang="en-US" smtClean="0"/>
-              <a:t>5/7/2026</a:t>
+              <a:t>6/13/2026</a:t>
             </a:fld>
             <a:endParaRPr lang="en-US"/>
           </a:p>
@@ -1955,7 +1959,7 @@
           <a:p>
             <a:fld id="{6383FAE1-13DE-4511-8C1B-C8AFB720664C}" type="datetimeFigureOut">
               <a:rPr lang="en-US" smtClean="0"/>
-              <a:t>5/7/2026</a:t>
+              <a:t>6/13/2026</a:t>
             </a:fld>
             <a:endParaRPr lang="en-US"/>
           </a:p>
@@ -2367,7 +2371,7 @@
           <a:p>
             <a:fld id="{6383FAE1-13DE-4511-8C1B-C8AFB720664C}" type="datetimeFigureOut">
               <a:rPr lang="en-US" smtClean="0"/>
-              <a:t>5/7/2026</a:t>
+              <a:t>6/13/2026</a:t>
             </a:fld>
             <a:endParaRPr lang="en-US"/>
           </a:p>
@@ -2508,7 +2512,7 @@
           <a:p>
             <a:fld id="{6383FAE1-13DE-4511-8C1B-C8AFB720664C}" type="datetimeFigureOut">
               <a:rPr lang="en-US" smtClean="0"/>
-              <a:t>5/7/2026</a:t>
+              <a:t>6/13/2026</a:t>
             </a:fld>
             <a:endParaRPr lang="en-US"/>
           </a:p>
@@ -2621,7 +2625,7 @@
           <a:p>
             <a:fld id="{6383FAE1-13DE-4511-8C1B-C8AFB720664C}" type="datetimeFigureOut">
               <a:rPr lang="en-US" smtClean="0"/>
-              <a:t>5/7/2026</a:t>
+              <a:t>6/13/2026</a:t>
             </a:fld>
             <a:endParaRPr lang="en-US"/>
           </a:p>
@@ -2932,7 +2936,7 @@
           <a:p>
             <a:fld id="{6383FAE1-13DE-4511-8C1B-C8AFB720664C}" type="datetimeFigureOut">
               <a:rPr lang="en-US" smtClean="0"/>
-              <a:t>5/7/2026</a:t>
+              <a:t>6/13/2026</a:t>
             </a:fld>
             <a:endParaRPr lang="en-US"/>
           </a:p>
@@ -3223,7 +3227,7 @@
           <a:p>
             <a:fld id="{6383FAE1-13DE-4511-8C1B-C8AFB720664C}" type="datetimeFigureOut">
               <a:rPr lang="en-US" smtClean="0"/>
-              <a:t>5/7/2026</a:t>
+              <a:t>6/13/2026</a:t>
             </a:fld>
             <a:endParaRPr lang="en-US"/>
           </a:p>
@@ -3467,7 +3471,7 @@
           <a:p>
             <a:fld id="{6383FAE1-13DE-4511-8C1B-C8AFB720664C}" type="datetimeFigureOut">
               <a:rPr lang="en-US" smtClean="0"/>
-              <a:t>5/7/2026</a:t>
+              <a:t>6/13/2026</a:t>
             </a:fld>
             <a:endParaRPr lang="en-US"/>
           </a:p>
@@ -4141,6 +4145,204 @@
 </p:sld>
 </file>
 
+<file path=ppt/slides/slide10.xml><?xml version="1.0" encoding="utf-8"?>
+<p:sld xmlns:a="http://schemas.openxmlformats.org/drawingml/2006/main" xmlns:r="http://schemas.openxmlformats.org/officeDocument/2006/relationships" xmlns:p="http://schemas.openxmlformats.org/presentationml/2006/main">
+  <p:cSld>
+    <p:spTree>
+      <p:nvGrpSpPr>
+        <p:cNvPr id="1" name="">
+          <a:extLst>
+            <a:ext uri="{FF2B5EF4-FFF2-40B4-BE49-F238E27FC236}">
+              <a16:creationId xmlns:a16="http://schemas.microsoft.com/office/drawing/2014/main" id="{2A083885-9D0F-5455-69EE-ABCD9A4E2CA0}"/>
+            </a:ext>
+          </a:extLst>
+        </p:cNvPr>
+        <p:cNvGrpSpPr/>
+        <p:nvPr/>
+      </p:nvGrpSpPr>
+      <p:grpSpPr>
+        <a:xfrm>
+          <a:off x="0" y="0"/>
+          <a:ext cx="0" cy="0"/>
+          <a:chOff x="0" y="0"/>
+          <a:chExt cx="0" cy="0"/>
+        </a:xfrm>
+      </p:grpSpPr>
+      <p:sp>
+        <p:nvSpPr>
+          <p:cNvPr id="2" name="Title 1">
+            <a:extLst>
+              <a:ext uri="{FF2B5EF4-FFF2-40B4-BE49-F238E27FC236}">
+                <a16:creationId xmlns:a16="http://schemas.microsoft.com/office/drawing/2014/main" id="{5B9414CA-3B14-8680-6417-43833CC7AC99}"/>
+              </a:ext>
+            </a:extLst>
+          </p:cNvPr>
+          <p:cNvSpPr>
+            <a:spLocks noGrp="1"/>
+          </p:cNvSpPr>
+          <p:nvPr>
+            <p:ph type="title"/>
+          </p:nvPr>
+        </p:nvSpPr>
+        <p:spPr>
+          <a:xfrm>
+            <a:off x="274320" y="136525"/>
+            <a:ext cx="11466576" cy="832739"/>
+          </a:xfrm>
+        </p:spPr>
+        <p:txBody>
+          <a:bodyPr>
+            <a:normAutofit/>
+          </a:bodyPr>
+          <a:lstStyle/>
+          <a:p>
+            <a:r>
+              <a:rPr lang="en-US" sz="3600" dirty="0"/>
+              <a:t>EXTRA</a:t>
+            </a:r>
+          </a:p>
+        </p:txBody>
+      </p:sp>
+      <p:sp>
+        <p:nvSpPr>
+          <p:cNvPr id="4" name="TextBox 3">
+            <a:extLst>
+              <a:ext uri="{FF2B5EF4-FFF2-40B4-BE49-F238E27FC236}">
+                <a16:creationId xmlns:a16="http://schemas.microsoft.com/office/drawing/2014/main" id="{B1A4303D-39C9-513F-ECDF-4C39F5338C5F}"/>
+              </a:ext>
+            </a:extLst>
+          </p:cNvPr>
+          <p:cNvSpPr txBox="1"/>
+          <p:nvPr/>
+        </p:nvSpPr>
+        <p:spPr>
+          <a:xfrm>
+            <a:off x="274320" y="933117"/>
+            <a:ext cx="11658600" cy="1477328"/>
+          </a:xfrm>
+          <a:prstGeom prst="rect">
+            <a:avLst/>
+          </a:prstGeom>
+          <a:noFill/>
+        </p:spPr>
+        <p:txBody>
+          <a:bodyPr wrap="square">
+            <a:spAutoFit/>
+          </a:bodyPr>
+          <a:lstStyle/>
+          <a:p>
+            <a:pPr marL="0" indent="0">
+              <a:buNone/>
+            </a:pPr>
+            <a:r>
+              <a:rPr lang="en-US" dirty="0" err="1">
+                <a:solidFill>
+                  <a:schemeClr val="accent6">
+                    <a:lumMod val="60000"/>
+                    <a:lumOff val="40000"/>
+                  </a:schemeClr>
+                </a:solidFill>
+              </a:rPr>
+              <a:t>Ffnbksdfd</a:t>
+            </a:r>
+            <a:endParaRPr lang="en-US" dirty="0">
+              <a:solidFill>
+                <a:schemeClr val="accent6">
+                  <a:lumMod val="60000"/>
+                  <a:lumOff val="40000"/>
+                </a:schemeClr>
+              </a:solidFill>
+            </a:endParaRPr>
+          </a:p>
+          <a:p>
+            <a:pPr marL="0" indent="0">
+              <a:buNone/>
+            </a:pPr>
+            <a:r>
+              <a:rPr lang="en-US" dirty="0" err="1">
+                <a:solidFill>
+                  <a:schemeClr val="accent6">
+                    <a:lumMod val="60000"/>
+                    <a:lumOff val="40000"/>
+                  </a:schemeClr>
+                </a:solidFill>
+              </a:rPr>
+              <a:t>Fdslj;f</a:t>
+            </a:r>
+            <a:endParaRPr lang="en-US" dirty="0">
+              <a:solidFill>
+                <a:schemeClr val="accent6">
+                  <a:lumMod val="60000"/>
+                  <a:lumOff val="40000"/>
+                </a:schemeClr>
+              </a:solidFill>
+            </a:endParaRPr>
+          </a:p>
+          <a:p>
+            <a:pPr marL="0" indent="0">
+              <a:buNone/>
+            </a:pPr>
+            <a:endParaRPr lang="en-US" dirty="0">
+              <a:solidFill>
+                <a:schemeClr val="accent6">
+                  <a:lumMod val="60000"/>
+                  <a:lumOff val="40000"/>
+                </a:schemeClr>
+              </a:solidFill>
+            </a:endParaRPr>
+          </a:p>
+          <a:p>
+            <a:pPr marL="0" indent="0">
+              <a:buNone/>
+            </a:pPr>
+            <a:r>
+              <a:rPr lang="en-US" dirty="0" err="1">
+                <a:solidFill>
+                  <a:schemeClr val="accent6">
+                    <a:lumMod val="60000"/>
+                    <a:lumOff val="40000"/>
+                  </a:schemeClr>
+                </a:solidFill>
+              </a:rPr>
+              <a:t>Fl;ds</a:t>
+            </a:r>
+            <a:endParaRPr lang="en-US" dirty="0">
+              <a:solidFill>
+                <a:schemeClr val="accent6">
+                  <a:lumMod val="60000"/>
+                  <a:lumOff val="40000"/>
+                </a:schemeClr>
+              </a:solidFill>
+            </a:endParaRPr>
+          </a:p>
+          <a:p>
+            <a:pPr marL="0" indent="0">
+              <a:buNone/>
+            </a:pPr>
+            <a:endParaRPr lang="en-US" dirty="0">
+              <a:solidFill>
+                <a:schemeClr val="accent6">
+                  <a:lumMod val="60000"/>
+                  <a:lumOff val="40000"/>
+                </a:schemeClr>
+              </a:solidFill>
+            </a:endParaRPr>
+          </a:p>
+        </p:txBody>
+      </p:sp>
+    </p:spTree>
+    <p:extLst>
+      <p:ext uri="{BB962C8B-B14F-4D97-AF65-F5344CB8AC3E}">
+        <p14:creationId xmlns:p14="http://schemas.microsoft.com/office/powerpoint/2010/main" val="3733026399"/>
+      </p:ext>
+    </p:extLst>
+  </p:cSld>
+  <p:clrMapOvr>
+    <a:masterClrMapping/>
+  </p:clrMapOvr>
+</p:sld>
+</file>
+
 <file path=ppt/slides/slide2.xml><?xml version="1.0" encoding="utf-8"?>
 <p:sld xmlns:a="http://schemas.openxmlformats.org/drawingml/2006/main" xmlns:r="http://schemas.openxmlformats.org/officeDocument/2006/relationships" xmlns:p="http://schemas.openxmlformats.org/presentationml/2006/main">
   <p:cSld>
@@ -4179,7 +4381,7 @@
         <p:spPr>
           <a:xfrm>
             <a:off x="246888" y="226536"/>
-            <a:ext cx="11631168" cy="5262979"/>
+            <a:ext cx="11631168" cy="4893647"/>
           </a:xfrm>
           <a:prstGeom prst="rect">
             <a:avLst/>
@@ -4232,18 +4434,8 @@
                   </a:schemeClr>
                 </a:solidFill>
               </a:rPr>
-              <a:t>## Work with python3.10. Do not work with higher version.</a:t>
-            </a:r>
-            <a:endParaRPr lang="en-US" sz="2400" dirty="0">
-              <a:solidFill>
-                <a:schemeClr val="accent6">
-                  <a:lumMod val="60000"/>
-                  <a:lumOff val="40000"/>
-                </a:schemeClr>
-              </a:solidFill>
-            </a:endParaRPr>
-          </a:p>
-          <a:p>
+              <a:t>## Work with python3.11. </a:t>
+            </a:r>
             <a:br>
               <a:rPr lang="en-US" sz="2400" dirty="0">
                 <a:solidFill>
@@ -4316,7 +4508,7 @@
                   </a:schemeClr>
                 </a:solidFill>
               </a:rPr>
-              <a:t>&gt; C:\Users\hi\AppData\Local\Programs\Python\Python310\python.exe -m </a:t>
+              <a:t>&gt; C:\Users\hi\AppData\Local\Programs\Python\Python311\python.exe -m </a:t>
             </a:r>
             <a:r>
               <a:rPr lang="en-US" sz="2400" dirty="0" err="1">
@@ -4390,10 +4582,10 @@
                   </a:schemeClr>
                 </a:solidFill>
               </a:rPr>
-              <a:t>### 2) Activate virtual </a:t>
-            </a:r>
-            <a:r>
-              <a:rPr lang="en-US" sz="2400" b="1" dirty="0" err="1">
+              <a:t>### 2) Activate </a:t>
+            </a:r>
+            <a:r>
+              <a:rPr lang="en-US" sz="2400" b="1">
                 <a:solidFill>
                   <a:schemeClr val="accent6">
                     <a:lumMod val="60000"/>
@@ -4401,7 +4593,7 @@
                   </a:schemeClr>
                 </a:solidFill>
               </a:rPr>
-              <a:t>envir</a:t>
+              <a:t>virtual environment</a:t>
             </a:r>
             <a:endParaRPr lang="en-US" sz="2400" dirty="0">
               <a:solidFill>
@@ -4493,6 +4685,279 @@
 </file>
 
 <file path=ppt/slides/slide3.xml><?xml version="1.0" encoding="utf-8"?>
+<p:sld xmlns:a="http://schemas.openxmlformats.org/drawingml/2006/main" xmlns:r="http://schemas.openxmlformats.org/officeDocument/2006/relationships" xmlns:p="http://schemas.openxmlformats.org/presentationml/2006/main">
+  <p:cSld>
+    <p:spTree>
+      <p:nvGrpSpPr>
+        <p:cNvPr id="1" name="">
+          <a:extLst>
+            <a:ext uri="{FF2B5EF4-FFF2-40B4-BE49-F238E27FC236}">
+              <a16:creationId xmlns:a16="http://schemas.microsoft.com/office/drawing/2014/main" id="{5921FD0A-9CB0-ED03-189F-7860E3564DCE}"/>
+            </a:ext>
+          </a:extLst>
+        </p:cNvPr>
+        <p:cNvGrpSpPr/>
+        <p:nvPr/>
+      </p:nvGrpSpPr>
+      <p:grpSpPr>
+        <a:xfrm>
+          <a:off x="0" y="0"/>
+          <a:ext cx="0" cy="0"/>
+          <a:chOff x="0" y="0"/>
+          <a:chExt cx="0" cy="0"/>
+        </a:xfrm>
+      </p:grpSpPr>
+      <p:sp>
+        <p:nvSpPr>
+          <p:cNvPr id="9" name="TextBox 8">
+            <a:extLst>
+              <a:ext uri="{FF2B5EF4-FFF2-40B4-BE49-F238E27FC236}">
+                <a16:creationId xmlns:a16="http://schemas.microsoft.com/office/drawing/2014/main" id="{8E508F31-9080-9643-AF6F-8FDE60C8AC82}"/>
+              </a:ext>
+            </a:extLst>
+          </p:cNvPr>
+          <p:cNvSpPr txBox="1"/>
+          <p:nvPr/>
+        </p:nvSpPr>
+        <p:spPr>
+          <a:xfrm>
+            <a:off x="182880" y="226536"/>
+            <a:ext cx="11896344" cy="1938992"/>
+          </a:xfrm>
+          <a:prstGeom prst="rect">
+            <a:avLst/>
+          </a:prstGeom>
+          <a:noFill/>
+        </p:spPr>
+        <p:txBody>
+          <a:bodyPr wrap="square">
+            <a:spAutoFit/>
+          </a:bodyPr>
+          <a:lstStyle/>
+          <a:p>
+            <a:r>
+              <a:rPr lang="en-US" sz="2400" b="1" dirty="0">
+                <a:solidFill>
+                  <a:schemeClr val="accent6">
+                    <a:lumMod val="60000"/>
+                    <a:lumOff val="40000"/>
+                  </a:schemeClr>
+                </a:solidFill>
+              </a:rPr>
+              <a:t># STEPS</a:t>
+            </a:r>
+            <a:endParaRPr lang="en-US" sz="2400" dirty="0">
+              <a:solidFill>
+                <a:schemeClr val="accent6">
+                  <a:lumMod val="60000"/>
+                  <a:lumOff val="40000"/>
+                </a:schemeClr>
+              </a:solidFill>
+            </a:endParaRPr>
+          </a:p>
+          <a:p>
+            <a:br>
+              <a:rPr lang="en-US" sz="2400" dirty="0">
+                <a:solidFill>
+                  <a:schemeClr val="accent6">
+                    <a:lumMod val="60000"/>
+                    <a:lumOff val="40000"/>
+                  </a:schemeClr>
+                </a:solidFill>
+              </a:rPr>
+            </a:br>
+            <a:r>
+              <a:rPr lang="en-US" sz="2400" b="1" dirty="0">
+                <a:solidFill>
+                  <a:schemeClr val="accent6">
+                    <a:lumMod val="60000"/>
+                    <a:lumOff val="40000"/>
+                  </a:schemeClr>
+                </a:solidFill>
+              </a:rPr>
+              <a:t>### 3) Install following packages (Took 5 minutes)</a:t>
+            </a:r>
+          </a:p>
+          <a:p>
+            <a:endParaRPr lang="en-US" sz="2400" dirty="0">
+              <a:solidFill>
+                <a:schemeClr val="accent6">
+                  <a:lumMod val="60000"/>
+                  <a:lumOff val="40000"/>
+                </a:schemeClr>
+              </a:solidFill>
+            </a:endParaRPr>
+          </a:p>
+          <a:p>
+            <a:r>
+              <a:rPr lang="en-US" sz="2400" dirty="0">
+                <a:solidFill>
+                  <a:schemeClr val="accent6">
+                    <a:lumMod val="60000"/>
+                    <a:lumOff val="40000"/>
+                  </a:schemeClr>
+                </a:solidFill>
+              </a:rPr>
+              <a:t>&gt; !pip install </a:t>
+            </a:r>
+            <a:r>
+              <a:rPr lang="en-US" sz="2400" dirty="0" err="1">
+                <a:solidFill>
+                  <a:schemeClr val="accent6">
+                    <a:lumMod val="60000"/>
+                    <a:lumOff val="40000"/>
+                  </a:schemeClr>
+                </a:solidFill>
+              </a:rPr>
+              <a:t>langchain</a:t>
+            </a:r>
+            <a:r>
+              <a:rPr lang="en-US" sz="2400" dirty="0">
+                <a:solidFill>
+                  <a:schemeClr val="accent6">
+                    <a:lumMod val="60000"/>
+                    <a:lumOff val="40000"/>
+                  </a:schemeClr>
+                </a:solidFill>
+              </a:rPr>
+              <a:t>==1.3.6 </a:t>
+            </a:r>
+            <a:r>
+              <a:rPr lang="en-US" sz="2400" dirty="0" err="1">
+                <a:solidFill>
+                  <a:schemeClr val="accent6">
+                    <a:lumMod val="60000"/>
+                    <a:lumOff val="40000"/>
+                  </a:schemeClr>
+                </a:solidFill>
+              </a:rPr>
+              <a:t>langchain-openai</a:t>
+            </a:r>
+            <a:r>
+              <a:rPr lang="en-US" sz="2400" dirty="0">
+                <a:solidFill>
+                  <a:schemeClr val="accent6">
+                    <a:lumMod val="60000"/>
+                    <a:lumOff val="40000"/>
+                  </a:schemeClr>
+                </a:solidFill>
+              </a:rPr>
+              <a:t>==1.2.2 tabulate==0.10.0</a:t>
+            </a:r>
+          </a:p>
+        </p:txBody>
+      </p:sp>
+      <p:sp>
+        <p:nvSpPr>
+          <p:cNvPr id="2" name="TextBox 1">
+            <a:extLst>
+              <a:ext uri="{FF2B5EF4-FFF2-40B4-BE49-F238E27FC236}">
+                <a16:creationId xmlns:a16="http://schemas.microsoft.com/office/drawing/2014/main" id="{CD3F74FB-A744-A10F-FEE8-78E2EF082C5F}"/>
+              </a:ext>
+            </a:extLst>
+          </p:cNvPr>
+          <p:cNvSpPr txBox="1"/>
+          <p:nvPr/>
+        </p:nvSpPr>
+        <p:spPr>
+          <a:xfrm>
+            <a:off x="258064" y="3429000"/>
+            <a:ext cx="10292080" cy="1569660"/>
+          </a:xfrm>
+          <a:prstGeom prst="rect">
+            <a:avLst/>
+          </a:prstGeom>
+          <a:noFill/>
+        </p:spPr>
+        <p:txBody>
+          <a:bodyPr wrap="square">
+            <a:spAutoFit/>
+          </a:bodyPr>
+          <a:lstStyle/>
+          <a:p>
+            <a:endParaRPr lang="en-US" sz="2400" dirty="0">
+              <a:solidFill>
+                <a:schemeClr val="accent6">
+                  <a:lumMod val="60000"/>
+                  <a:lumOff val="40000"/>
+                </a:schemeClr>
+              </a:solidFill>
+            </a:endParaRPr>
+          </a:p>
+          <a:p>
+            <a:r>
+              <a:rPr lang="en-US" sz="2400" b="1" dirty="0">
+                <a:solidFill>
+                  <a:schemeClr val="accent6">
+                    <a:lumMod val="60000"/>
+                    <a:lumOff val="40000"/>
+                  </a:schemeClr>
+                </a:solidFill>
+              </a:rPr>
+              <a:t>### 4) run the program</a:t>
+            </a:r>
+          </a:p>
+          <a:p>
+            <a:endParaRPr lang="en-US" sz="2400" dirty="0">
+              <a:solidFill>
+                <a:schemeClr val="accent6">
+                  <a:lumMod val="60000"/>
+                  <a:lumOff val="40000"/>
+                </a:schemeClr>
+              </a:solidFill>
+            </a:endParaRPr>
+          </a:p>
+          <a:p>
+            <a:r>
+              <a:rPr lang="en-US" sz="2400" dirty="0">
+                <a:solidFill>
+                  <a:schemeClr val="accent6">
+                    <a:lumMod val="60000"/>
+                    <a:lumOff val="40000"/>
+                  </a:schemeClr>
+                </a:solidFill>
+              </a:rPr>
+              <a:t>&gt; python -m </a:t>
+            </a:r>
+            <a:r>
+              <a:rPr lang="en-US" sz="2400" dirty="0" err="1">
+                <a:solidFill>
+                  <a:schemeClr val="accent6">
+                    <a:lumMod val="60000"/>
+                    <a:lumOff val="40000"/>
+                  </a:schemeClr>
+                </a:solidFill>
+              </a:rPr>
+              <a:t>streamlit</a:t>
+            </a:r>
+            <a:r>
+              <a:rPr lang="en-US" sz="2400" dirty="0">
+                <a:solidFill>
+                  <a:schemeClr val="accent6">
+                    <a:lumMod val="60000"/>
+                    <a:lumOff val="40000"/>
+                  </a:schemeClr>
+                </a:solidFill>
+              </a:rPr>
+              <a:t> run app.py</a:t>
+            </a:r>
+          </a:p>
+        </p:txBody>
+      </p:sp>
+    </p:spTree>
+    <p:extLst>
+      <p:ext uri="{BB962C8B-B14F-4D97-AF65-F5344CB8AC3E}">
+        <p14:creationId xmlns:p14="http://schemas.microsoft.com/office/powerpoint/2010/main" val="3837488359"/>
+      </p:ext>
+    </p:extLst>
+  </p:cSld>
+  <p:clrMapOvr>
+    <a:masterClrMapping/>
+  </p:clrMapOvr>
+</p:sld>
+</file>
+
+<file path=ppt/slides/slide4.xml><?xml version="1.0" encoding="utf-8"?>
 <p:sld xmlns:a="http://schemas.openxmlformats.org/drawingml/2006/main" xmlns:r="http://schemas.openxmlformats.org/officeDocument/2006/relationships" xmlns:p="http://schemas.openxmlformats.org/presentationml/2006/main">
   <p:cSld>
     <p:spTree>
@@ -4515,917 +4980,10 @@
           <a:chExt cx="0" cy="0"/>
         </a:xfrm>
       </p:grpSpPr>
-      <p:sp>
-        <p:nvSpPr>
-          <p:cNvPr id="9" name="TextBox 8">
-            <a:extLst>
-              <a:ext uri="{FF2B5EF4-FFF2-40B4-BE49-F238E27FC236}">
-                <a16:creationId xmlns:a16="http://schemas.microsoft.com/office/drawing/2014/main" id="{CD3F74FB-A744-A10F-FEE8-78E2EF082C5F}"/>
-              </a:ext>
-            </a:extLst>
-          </p:cNvPr>
-          <p:cNvSpPr txBox="1"/>
-          <p:nvPr/>
-        </p:nvSpPr>
-        <p:spPr>
-          <a:xfrm>
-            <a:off x="477520" y="226536"/>
-            <a:ext cx="10292080" cy="3416320"/>
-          </a:xfrm>
-          <a:prstGeom prst="rect">
-            <a:avLst/>
-          </a:prstGeom>
-          <a:noFill/>
-        </p:spPr>
-        <p:txBody>
-          <a:bodyPr wrap="square">
-            <a:spAutoFit/>
-          </a:bodyPr>
-          <a:lstStyle/>
-          <a:p>
-            <a:r>
-              <a:rPr lang="en-US" sz="2400" b="1" dirty="0">
-                <a:solidFill>
-                  <a:schemeClr val="accent6">
-                    <a:lumMod val="60000"/>
-                    <a:lumOff val="40000"/>
-                  </a:schemeClr>
-                </a:solidFill>
-              </a:rPr>
-              <a:t># STEPS</a:t>
-            </a:r>
-            <a:endParaRPr lang="en-US" sz="2400" dirty="0">
-              <a:solidFill>
-                <a:schemeClr val="accent6">
-                  <a:lumMod val="60000"/>
-                  <a:lumOff val="40000"/>
-                </a:schemeClr>
-              </a:solidFill>
-            </a:endParaRPr>
-          </a:p>
-          <a:p>
-            <a:endParaRPr lang="en-US" sz="2400" dirty="0">
-              <a:solidFill>
-                <a:schemeClr val="accent6">
-                  <a:lumMod val="60000"/>
-                  <a:lumOff val="40000"/>
-                </a:schemeClr>
-              </a:solidFill>
-            </a:endParaRPr>
-          </a:p>
-          <a:p>
-            <a:r>
-              <a:rPr lang="en-US" sz="2400" b="1" dirty="0">
-                <a:solidFill>
-                  <a:schemeClr val="accent6">
-                    <a:lumMod val="60000"/>
-                    <a:lumOff val="40000"/>
-                  </a:schemeClr>
-                </a:solidFill>
-              </a:rPr>
-              <a:t>### 3) Install </a:t>
-            </a:r>
-            <a:r>
-              <a:rPr lang="en-US" sz="2400" b="1" dirty="0" err="1">
-                <a:solidFill>
-                  <a:schemeClr val="accent6">
-                    <a:lumMod val="60000"/>
-                    <a:lumOff val="40000"/>
-                  </a:schemeClr>
-                </a:solidFill>
-              </a:rPr>
-              <a:t>jupyter</a:t>
-            </a:r>
-            <a:r>
-              <a:rPr lang="en-US" sz="2400" b="1" dirty="0">
-                <a:solidFill>
-                  <a:schemeClr val="accent6">
-                    <a:lumMod val="60000"/>
-                    <a:lumOff val="40000"/>
-                  </a:schemeClr>
-                </a:solidFill>
-              </a:rPr>
-              <a:t> </a:t>
-            </a:r>
-            <a:r>
-              <a:rPr lang="en-US" sz="2400" dirty="0">
-                <a:solidFill>
-                  <a:schemeClr val="accent6">
-                    <a:lumMod val="60000"/>
-                    <a:lumOff val="40000"/>
-                  </a:schemeClr>
-                </a:solidFill>
-              </a:rPr>
-              <a:t>(Took 3 minutes)</a:t>
-            </a:r>
-            <a:r>
-              <a:rPr lang="en-US" sz="2400" b="1" dirty="0">
-                <a:solidFill>
-                  <a:schemeClr val="accent6">
-                    <a:lumMod val="60000"/>
-                    <a:lumOff val="40000"/>
-                  </a:schemeClr>
-                </a:solidFill>
-              </a:rPr>
-              <a:t>:</a:t>
-            </a:r>
-            <a:endParaRPr lang="en-US" sz="2400" dirty="0">
-              <a:solidFill>
-                <a:schemeClr val="accent6">
-                  <a:lumMod val="60000"/>
-                  <a:lumOff val="40000"/>
-                </a:schemeClr>
-              </a:solidFill>
-            </a:endParaRPr>
-          </a:p>
-          <a:p>
-            <a:br>
-              <a:rPr lang="en-US" sz="2400" dirty="0">
-                <a:solidFill>
-                  <a:schemeClr val="accent6">
-                    <a:lumMod val="60000"/>
-                    <a:lumOff val="40000"/>
-                  </a:schemeClr>
-                </a:solidFill>
-              </a:rPr>
-            </a:br>
-            <a:r>
-              <a:rPr lang="en-US" sz="2400" dirty="0">
-                <a:solidFill>
-                  <a:schemeClr val="accent6">
-                    <a:lumMod val="60000"/>
-                    <a:lumOff val="40000"/>
-                  </a:schemeClr>
-                </a:solidFill>
-              </a:rPr>
-              <a:t>&gt; python -m pip install </a:t>
-            </a:r>
-            <a:r>
-              <a:rPr lang="en-US" sz="2400" dirty="0" err="1">
-                <a:solidFill>
-                  <a:schemeClr val="accent6">
-                    <a:lumMod val="60000"/>
-                    <a:lumOff val="40000"/>
-                  </a:schemeClr>
-                </a:solidFill>
-              </a:rPr>
-              <a:t>jupyter</a:t>
-            </a:r>
-            <a:endParaRPr lang="en-US" sz="2400" dirty="0">
-              <a:solidFill>
-                <a:schemeClr val="accent6">
-                  <a:lumMod val="60000"/>
-                  <a:lumOff val="40000"/>
-                </a:schemeClr>
-              </a:solidFill>
-            </a:endParaRPr>
-          </a:p>
-          <a:p>
-            <a:br>
-              <a:rPr lang="en-US" sz="2400" dirty="0">
-                <a:solidFill>
-                  <a:schemeClr val="accent6">
-                    <a:lumMod val="60000"/>
-                    <a:lumOff val="40000"/>
-                  </a:schemeClr>
-                </a:solidFill>
-              </a:rPr>
-            </a:br>
-            <a:r>
-              <a:rPr lang="en-US" sz="2400" b="1" dirty="0">
-                <a:solidFill>
-                  <a:schemeClr val="accent6">
-                    <a:lumMod val="60000"/>
-                    <a:lumOff val="40000"/>
-                  </a:schemeClr>
-                </a:solidFill>
-              </a:rPr>
-              <a:t>### 4) Run </a:t>
-            </a:r>
-            <a:r>
-              <a:rPr lang="en-US" sz="2400" b="1" dirty="0" err="1">
-                <a:solidFill>
-                  <a:schemeClr val="accent6">
-                    <a:lumMod val="60000"/>
-                    <a:lumOff val="40000"/>
-                  </a:schemeClr>
-                </a:solidFill>
-              </a:rPr>
-              <a:t>jupyter</a:t>
-            </a:r>
-            <a:r>
-              <a:rPr lang="en-US" sz="2400" b="1" dirty="0">
-                <a:solidFill>
-                  <a:schemeClr val="accent6">
-                    <a:lumMod val="60000"/>
-                    <a:lumOff val="40000"/>
-                  </a:schemeClr>
-                </a:solidFill>
-              </a:rPr>
-              <a:t>:</a:t>
-            </a:r>
-            <a:endParaRPr lang="en-US" sz="2400" dirty="0">
-              <a:solidFill>
-                <a:schemeClr val="accent6">
-                  <a:lumMod val="60000"/>
-                  <a:lumOff val="40000"/>
-                </a:schemeClr>
-              </a:solidFill>
-            </a:endParaRPr>
-          </a:p>
-          <a:p>
-            <a:br>
-              <a:rPr lang="en-US" sz="2400" dirty="0">
-                <a:solidFill>
-                  <a:schemeClr val="accent6">
-                    <a:lumMod val="60000"/>
-                    <a:lumOff val="40000"/>
-                  </a:schemeClr>
-                </a:solidFill>
-              </a:rPr>
-            </a:br>
-            <a:r>
-              <a:rPr lang="en-US" sz="2400" dirty="0">
-                <a:solidFill>
-                  <a:schemeClr val="accent6">
-                    <a:lumMod val="60000"/>
-                    <a:lumOff val="40000"/>
-                  </a:schemeClr>
-                </a:solidFill>
-              </a:rPr>
-              <a:t>&gt; python -m </a:t>
-            </a:r>
-            <a:r>
-              <a:rPr lang="en-US" sz="2400" dirty="0" err="1">
-                <a:solidFill>
-                  <a:schemeClr val="accent6">
-                    <a:lumMod val="60000"/>
-                    <a:lumOff val="40000"/>
-                  </a:schemeClr>
-                </a:solidFill>
-              </a:rPr>
-              <a:t>jupyter</a:t>
-            </a:r>
-            <a:r>
-              <a:rPr lang="en-US" sz="2400" dirty="0">
-                <a:solidFill>
-                  <a:schemeClr val="accent6">
-                    <a:lumMod val="60000"/>
-                    <a:lumOff val="40000"/>
-                  </a:schemeClr>
-                </a:solidFill>
-              </a:rPr>
-              <a:t> notebook</a:t>
-            </a:r>
-          </a:p>
-        </p:txBody>
-      </p:sp>
     </p:spTree>
     <p:extLst>
       <p:ext uri="{BB962C8B-B14F-4D97-AF65-F5344CB8AC3E}">
         <p14:creationId xmlns:p14="http://schemas.microsoft.com/office/powerpoint/2010/main" val="3080943082"/>
-      </p:ext>
-    </p:extLst>
-  </p:cSld>
-  <p:clrMapOvr>
-    <a:masterClrMapping/>
-  </p:clrMapOvr>
-</p:sld>
-</file>
-
-<file path=ppt/slides/slide4.xml><?xml version="1.0" encoding="utf-8"?>
-<p:sld xmlns:a="http://schemas.openxmlformats.org/drawingml/2006/main" xmlns:r="http://schemas.openxmlformats.org/officeDocument/2006/relationships" xmlns:p="http://schemas.openxmlformats.org/presentationml/2006/main">
-  <p:cSld>
-    <p:spTree>
-      <p:nvGrpSpPr>
-        <p:cNvPr id="1" name="">
-          <a:extLst>
-            <a:ext uri="{FF2B5EF4-FFF2-40B4-BE49-F238E27FC236}">
-              <a16:creationId xmlns:a16="http://schemas.microsoft.com/office/drawing/2014/main" id="{5921FD0A-9CB0-ED03-189F-7860E3564DCE}"/>
-            </a:ext>
-          </a:extLst>
-        </p:cNvPr>
-        <p:cNvGrpSpPr/>
-        <p:nvPr/>
-      </p:nvGrpSpPr>
-      <p:grpSpPr>
-        <a:xfrm>
-          <a:off x="0" y="0"/>
-          <a:ext cx="0" cy="0"/>
-          <a:chOff x="0" y="0"/>
-          <a:chExt cx="0" cy="0"/>
-        </a:xfrm>
-      </p:grpSpPr>
-      <p:sp>
-        <p:nvSpPr>
-          <p:cNvPr id="9" name="TextBox 8">
-            <a:extLst>
-              <a:ext uri="{FF2B5EF4-FFF2-40B4-BE49-F238E27FC236}">
-                <a16:creationId xmlns:a16="http://schemas.microsoft.com/office/drawing/2014/main" id="{8E508F31-9080-9643-AF6F-8FDE60C8AC82}"/>
-              </a:ext>
-            </a:extLst>
-          </p:cNvPr>
-          <p:cNvSpPr txBox="1"/>
-          <p:nvPr/>
-        </p:nvSpPr>
-        <p:spPr>
-          <a:xfrm>
-            <a:off x="182880" y="226536"/>
-            <a:ext cx="11896344" cy="6924973"/>
-          </a:xfrm>
-          <a:prstGeom prst="rect">
-            <a:avLst/>
-          </a:prstGeom>
-          <a:noFill/>
-        </p:spPr>
-        <p:txBody>
-          <a:bodyPr wrap="square">
-            <a:spAutoFit/>
-          </a:bodyPr>
-          <a:lstStyle/>
-          <a:p>
-            <a:r>
-              <a:rPr lang="en-US" sz="2400" b="1" dirty="0">
-                <a:solidFill>
-                  <a:schemeClr val="accent6">
-                    <a:lumMod val="60000"/>
-                    <a:lumOff val="40000"/>
-                  </a:schemeClr>
-                </a:solidFill>
-              </a:rPr>
-              <a:t># STEPS</a:t>
-            </a:r>
-            <a:endParaRPr lang="en-US" sz="2400" dirty="0">
-              <a:solidFill>
-                <a:schemeClr val="accent6">
-                  <a:lumMod val="60000"/>
-                  <a:lumOff val="40000"/>
-                </a:schemeClr>
-              </a:solidFill>
-            </a:endParaRPr>
-          </a:p>
-          <a:p>
-            <a:br>
-              <a:rPr lang="en-US" sz="2400" dirty="0">
-                <a:solidFill>
-                  <a:schemeClr val="accent6">
-                    <a:lumMod val="60000"/>
-                    <a:lumOff val="40000"/>
-                  </a:schemeClr>
-                </a:solidFill>
-              </a:rPr>
-            </a:br>
-            <a:r>
-              <a:rPr lang="en-US" sz="2400" b="1" dirty="0">
-                <a:solidFill>
-                  <a:schemeClr val="accent6">
-                    <a:lumMod val="60000"/>
-                    <a:lumOff val="40000"/>
-                  </a:schemeClr>
-                </a:solidFill>
-              </a:rPr>
-              <a:t>### 5) Install following packages from </a:t>
-            </a:r>
-            <a:r>
-              <a:rPr lang="en-US" sz="2400" b="1" dirty="0" err="1">
-                <a:solidFill>
-                  <a:schemeClr val="accent6">
-                    <a:lumMod val="60000"/>
-                    <a:lumOff val="40000"/>
-                  </a:schemeClr>
-                </a:solidFill>
-              </a:rPr>
-              <a:t>jupyter</a:t>
-            </a:r>
-            <a:r>
-              <a:rPr lang="en-US" sz="2400" b="1" dirty="0">
-                <a:solidFill>
-                  <a:schemeClr val="accent6">
-                    <a:lumMod val="60000"/>
-                    <a:lumOff val="40000"/>
-                  </a:schemeClr>
-                </a:solidFill>
-              </a:rPr>
-              <a:t> (or use python virtual end):</a:t>
-            </a:r>
-            <a:endParaRPr lang="en-US" sz="2400" dirty="0">
-              <a:solidFill>
-                <a:schemeClr val="accent6">
-                  <a:lumMod val="60000"/>
-                  <a:lumOff val="40000"/>
-                </a:schemeClr>
-              </a:solidFill>
-            </a:endParaRPr>
-          </a:p>
-          <a:p>
-            <a:br>
-              <a:rPr lang="en-US" sz="2400" dirty="0">
-                <a:solidFill>
-                  <a:schemeClr val="accent6">
-                    <a:lumMod val="60000"/>
-                    <a:lumOff val="40000"/>
-                  </a:schemeClr>
-                </a:solidFill>
-              </a:rPr>
-            </a:br>
-            <a:endParaRPr lang="en-US" sz="2400" dirty="0">
-              <a:solidFill>
-                <a:schemeClr val="accent6">
-                  <a:lumMod val="60000"/>
-                  <a:lumOff val="40000"/>
-                </a:schemeClr>
-              </a:solidFill>
-            </a:endParaRPr>
-          </a:p>
-          <a:p>
-            <a:r>
-              <a:rPr lang="en-US" sz="2400" b="1" dirty="0">
-                <a:solidFill>
-                  <a:schemeClr val="accent6">
-                    <a:lumMod val="60000"/>
-                    <a:lumOff val="40000"/>
-                  </a:schemeClr>
-                </a:solidFill>
-              </a:rPr>
-              <a:t>#### From </a:t>
-            </a:r>
-            <a:r>
-              <a:rPr lang="en-US" sz="2400" b="1" dirty="0" err="1">
-                <a:solidFill>
-                  <a:schemeClr val="accent6">
-                    <a:lumMod val="60000"/>
-                    <a:lumOff val="40000"/>
-                  </a:schemeClr>
-                </a:solidFill>
-              </a:rPr>
-              <a:t>Jupyter</a:t>
-            </a:r>
-            <a:r>
-              <a:rPr lang="en-US" sz="2400" b="1" dirty="0">
-                <a:solidFill>
-                  <a:schemeClr val="accent6">
-                    <a:lumMod val="60000"/>
-                    <a:lumOff val="40000"/>
-                  </a:schemeClr>
-                </a:solidFill>
-              </a:rPr>
-              <a:t> (Took 5 minutes)</a:t>
-            </a:r>
-            <a:endParaRPr lang="en-US" sz="2400" dirty="0">
-              <a:solidFill>
-                <a:schemeClr val="accent6">
-                  <a:lumMod val="60000"/>
-                  <a:lumOff val="40000"/>
-                </a:schemeClr>
-              </a:solidFill>
-            </a:endParaRPr>
-          </a:p>
-          <a:p>
-            <a:r>
-              <a:rPr lang="en-US" sz="2400" dirty="0">
-                <a:solidFill>
-                  <a:schemeClr val="accent6">
-                    <a:lumMod val="60000"/>
-                    <a:lumOff val="40000"/>
-                  </a:schemeClr>
-                </a:solidFill>
-              </a:rPr>
-              <a:t>&gt; !pip install </a:t>
-            </a:r>
-            <a:r>
-              <a:rPr lang="en-US" sz="2400" dirty="0" err="1">
-                <a:solidFill>
-                  <a:schemeClr val="accent6">
-                    <a:lumMod val="60000"/>
-                    <a:lumOff val="40000"/>
-                  </a:schemeClr>
-                </a:solidFill>
-              </a:rPr>
-              <a:t>langchain</a:t>
-            </a:r>
-            <a:r>
-              <a:rPr lang="en-US" sz="2400" dirty="0">
-                <a:solidFill>
-                  <a:schemeClr val="accent6">
-                    <a:lumMod val="60000"/>
-                    <a:lumOff val="40000"/>
-                  </a:schemeClr>
-                </a:solidFill>
-              </a:rPr>
-              <a:t>== 0.2.17 </a:t>
-            </a:r>
-            <a:r>
-              <a:rPr lang="en-US" sz="2400" dirty="0" err="1">
-                <a:solidFill>
-                  <a:schemeClr val="accent6">
-                    <a:lumMod val="60000"/>
-                    <a:lumOff val="40000"/>
-                  </a:schemeClr>
-                </a:solidFill>
-              </a:rPr>
-              <a:t>langchain</a:t>
-            </a:r>
-            <a:r>
-              <a:rPr lang="en-US" sz="2400" dirty="0">
-                <a:solidFill>
-                  <a:schemeClr val="accent6">
-                    <a:lumMod val="60000"/>
-                    <a:lumOff val="40000"/>
-                  </a:schemeClr>
-                </a:solidFill>
-              </a:rPr>
-              <a:t>-community== 0.2.19 </a:t>
-            </a:r>
-            <a:r>
-              <a:rPr lang="en-US" sz="2400" dirty="0" err="1">
-                <a:solidFill>
-                  <a:schemeClr val="accent6">
-                    <a:lumMod val="60000"/>
-                    <a:lumOff val="40000"/>
-                  </a:schemeClr>
-                </a:solidFill>
-              </a:rPr>
-              <a:t>langchain-openai</a:t>
-            </a:r>
-            <a:r>
-              <a:rPr lang="en-US" sz="2400" dirty="0">
-                <a:solidFill>
-                  <a:schemeClr val="accent6">
-                    <a:lumMod val="60000"/>
-                    <a:lumOff val="40000"/>
-                  </a:schemeClr>
-                </a:solidFill>
-              </a:rPr>
-              <a:t>==0.1.25</a:t>
-            </a:r>
-          </a:p>
-          <a:p>
-            <a:r>
-              <a:rPr lang="en-US" sz="2400" dirty="0">
-                <a:solidFill>
-                  <a:schemeClr val="accent6">
-                    <a:lumMod val="60000"/>
-                    <a:lumOff val="40000"/>
-                  </a:schemeClr>
-                </a:solidFill>
-              </a:rPr>
-              <a:t>&gt; !pip install </a:t>
-            </a:r>
-            <a:r>
-              <a:rPr lang="en-US" sz="2400" dirty="0" err="1">
-                <a:solidFill>
-                  <a:schemeClr val="accent6">
-                    <a:lumMod val="60000"/>
-                    <a:lumOff val="40000"/>
-                  </a:schemeClr>
-                </a:solidFill>
-              </a:rPr>
-              <a:t>langchain</a:t>
-            </a:r>
-            <a:r>
-              <a:rPr lang="en-US" sz="2400" dirty="0">
-                <a:solidFill>
-                  <a:schemeClr val="accent6">
-                    <a:lumMod val="60000"/>
-                    <a:lumOff val="40000"/>
-                  </a:schemeClr>
-                </a:solidFill>
-              </a:rPr>
-              <a:t>-experimental==0.0.65 tabulate</a:t>
-            </a:r>
-          </a:p>
-          <a:p>
-            <a:endParaRPr lang="en-US" sz="2400" dirty="0">
-              <a:solidFill>
-                <a:schemeClr val="accent6">
-                  <a:lumMod val="60000"/>
-                  <a:lumOff val="40000"/>
-                </a:schemeClr>
-              </a:solidFill>
-            </a:endParaRPr>
-          </a:p>
-          <a:p>
-            <a:r>
-              <a:rPr lang="en-US" sz="2400" dirty="0">
-                <a:solidFill>
-                  <a:schemeClr val="accent6">
-                    <a:lumMod val="60000"/>
-                    <a:lumOff val="40000"/>
-                  </a:schemeClr>
-                </a:solidFill>
-              </a:rPr>
-              <a:t>OR</a:t>
-            </a:r>
-          </a:p>
-          <a:p>
-            <a:r>
-              <a:rPr lang="en-US" sz="2400" b="1" dirty="0">
-                <a:solidFill>
-                  <a:schemeClr val="accent6">
-                    <a:lumMod val="60000"/>
-                    <a:lumOff val="40000"/>
-                  </a:schemeClr>
-                </a:solidFill>
-              </a:rPr>
-              <a:t>#### From command line</a:t>
-            </a:r>
-            <a:endParaRPr lang="en-US" sz="2400" dirty="0">
-              <a:solidFill>
-                <a:schemeClr val="accent6">
-                  <a:lumMod val="60000"/>
-                  <a:lumOff val="40000"/>
-                </a:schemeClr>
-              </a:solidFill>
-            </a:endParaRPr>
-          </a:p>
-          <a:p>
-            <a:endParaRPr lang="en-US" sz="2400" dirty="0">
-              <a:solidFill>
-                <a:schemeClr val="accent6">
-                  <a:lumMod val="60000"/>
-                  <a:lumOff val="40000"/>
-                </a:schemeClr>
-              </a:solidFill>
-            </a:endParaRPr>
-          </a:p>
-          <a:p>
-            <a:r>
-              <a:rPr lang="en-US" sz="2400" dirty="0">
-                <a:solidFill>
-                  <a:schemeClr val="accent6">
-                    <a:lumMod val="60000"/>
-                    <a:lumOff val="40000"/>
-                  </a:schemeClr>
-                </a:solidFill>
-              </a:rPr>
-              <a:t>&gt;  </a:t>
-            </a:r>
-            <a:r>
-              <a:rPr lang="en-US" sz="2000" dirty="0">
-                <a:solidFill>
-                  <a:schemeClr val="accent6">
-                    <a:lumMod val="60000"/>
-                    <a:lumOff val="40000"/>
-                  </a:schemeClr>
-                </a:solidFill>
-              </a:rPr>
-              <a:t>.\.</a:t>
-            </a:r>
-            <a:r>
-              <a:rPr lang="en-US" sz="2000" dirty="0" err="1">
-                <a:solidFill>
-                  <a:schemeClr val="accent6">
-                    <a:lumMod val="60000"/>
-                    <a:lumOff val="40000"/>
-                  </a:schemeClr>
-                </a:solidFill>
-              </a:rPr>
-              <a:t>venv</a:t>
-            </a:r>
-            <a:r>
-              <a:rPr lang="en-US" sz="2000" dirty="0">
-                <a:solidFill>
-                  <a:schemeClr val="accent6">
-                    <a:lumMod val="60000"/>
-                    <a:lumOff val="40000"/>
-                  </a:schemeClr>
-                </a:solidFill>
-              </a:rPr>
-              <a:t>\Scripts\python.exe –m pip install </a:t>
-            </a:r>
-            <a:r>
-              <a:rPr lang="en-US" sz="2000" dirty="0" err="1">
-                <a:solidFill>
-                  <a:schemeClr val="accent6">
-                    <a:lumMod val="60000"/>
-                    <a:lumOff val="40000"/>
-                  </a:schemeClr>
-                </a:solidFill>
-              </a:rPr>
-              <a:t>langchain</a:t>
-            </a:r>
-            <a:r>
-              <a:rPr lang="en-US" sz="2000" dirty="0">
-                <a:solidFill>
-                  <a:schemeClr val="accent6">
-                    <a:lumMod val="60000"/>
-                    <a:lumOff val="40000"/>
-                  </a:schemeClr>
-                </a:solidFill>
-              </a:rPr>
-              <a:t>== 0.2.17 </a:t>
-            </a:r>
-            <a:r>
-              <a:rPr lang="en-US" sz="2000" dirty="0" err="1">
-                <a:solidFill>
-                  <a:schemeClr val="accent6">
-                    <a:lumMod val="60000"/>
-                    <a:lumOff val="40000"/>
-                  </a:schemeClr>
-                </a:solidFill>
-              </a:rPr>
-              <a:t>langchain</a:t>
-            </a:r>
-            <a:r>
-              <a:rPr lang="en-US" sz="2000" dirty="0">
-                <a:solidFill>
-                  <a:schemeClr val="accent6">
-                    <a:lumMod val="60000"/>
-                    <a:lumOff val="40000"/>
-                  </a:schemeClr>
-                </a:solidFill>
-              </a:rPr>
-              <a:t>-community== 0.2.19</a:t>
-            </a:r>
-          </a:p>
-          <a:p>
-            <a:r>
-              <a:rPr lang="en-US" sz="2000" dirty="0">
-                <a:solidFill>
-                  <a:schemeClr val="accent6">
-                    <a:lumMod val="60000"/>
-                    <a:lumOff val="40000"/>
-                  </a:schemeClr>
-                </a:solidFill>
-              </a:rPr>
-              <a:t>&gt;  .\.</a:t>
-            </a:r>
-            <a:r>
-              <a:rPr lang="en-US" sz="2000" dirty="0" err="1">
-                <a:solidFill>
-                  <a:schemeClr val="accent6">
-                    <a:lumMod val="60000"/>
-                    <a:lumOff val="40000"/>
-                  </a:schemeClr>
-                </a:solidFill>
-              </a:rPr>
-              <a:t>venv</a:t>
-            </a:r>
-            <a:r>
-              <a:rPr lang="en-US" sz="2000" dirty="0">
-                <a:solidFill>
-                  <a:schemeClr val="accent6">
-                    <a:lumMod val="60000"/>
-                    <a:lumOff val="40000"/>
-                  </a:schemeClr>
-                </a:solidFill>
-              </a:rPr>
-              <a:t>\Scripts\python.exe –m pip install </a:t>
-            </a:r>
-            <a:r>
-              <a:rPr lang="en-US" sz="2000" dirty="0" err="1">
-                <a:solidFill>
-                  <a:schemeClr val="accent6">
-                    <a:lumMod val="60000"/>
-                    <a:lumOff val="40000"/>
-                  </a:schemeClr>
-                </a:solidFill>
-              </a:rPr>
-              <a:t>langchain-openai</a:t>
-            </a:r>
-            <a:r>
-              <a:rPr lang="en-US" sz="2000" dirty="0">
-                <a:solidFill>
-                  <a:schemeClr val="accent6">
-                    <a:lumMod val="60000"/>
-                    <a:lumOff val="40000"/>
-                  </a:schemeClr>
-                </a:solidFill>
-              </a:rPr>
-              <a:t>==0.1.25 </a:t>
-            </a:r>
-          </a:p>
-          <a:p>
-            <a:r>
-              <a:rPr lang="en-US" sz="2000" dirty="0">
-                <a:solidFill>
-                  <a:schemeClr val="accent6">
-                    <a:lumMod val="60000"/>
-                    <a:lumOff val="40000"/>
-                  </a:schemeClr>
-                </a:solidFill>
-              </a:rPr>
-              <a:t>&gt;  .\.</a:t>
-            </a:r>
-            <a:r>
-              <a:rPr lang="en-US" sz="2000" dirty="0" err="1">
-                <a:solidFill>
-                  <a:schemeClr val="accent6">
-                    <a:lumMod val="60000"/>
-                    <a:lumOff val="40000"/>
-                  </a:schemeClr>
-                </a:solidFill>
-              </a:rPr>
-              <a:t>venv</a:t>
-            </a:r>
-            <a:r>
-              <a:rPr lang="en-US" sz="2000" dirty="0">
-                <a:solidFill>
-                  <a:schemeClr val="accent6">
-                    <a:lumMod val="60000"/>
-                    <a:lumOff val="40000"/>
-                  </a:schemeClr>
-                </a:solidFill>
-              </a:rPr>
-              <a:t>\Scripts\python.exe –m pip install </a:t>
-            </a:r>
-            <a:r>
-              <a:rPr lang="en-US" sz="2000" dirty="0" err="1">
-                <a:solidFill>
-                  <a:schemeClr val="accent6">
-                    <a:lumMod val="60000"/>
-                    <a:lumOff val="40000"/>
-                  </a:schemeClr>
-                </a:solidFill>
-              </a:rPr>
-              <a:t>langchain</a:t>
-            </a:r>
-            <a:r>
-              <a:rPr lang="en-US" sz="2000" dirty="0">
-                <a:solidFill>
-                  <a:schemeClr val="accent6">
-                    <a:lumMod val="60000"/>
-                    <a:lumOff val="40000"/>
-                  </a:schemeClr>
-                </a:solidFill>
-              </a:rPr>
-              <a:t>-experimental==0.0.65 </a:t>
-            </a:r>
-          </a:p>
-          <a:p>
-            <a:r>
-              <a:rPr lang="en-US" sz="2000" dirty="0">
-                <a:solidFill>
-                  <a:schemeClr val="accent6">
-                    <a:lumMod val="60000"/>
-                    <a:lumOff val="40000"/>
-                  </a:schemeClr>
-                </a:solidFill>
-              </a:rPr>
-              <a:t>&gt;  .\.</a:t>
-            </a:r>
-            <a:r>
-              <a:rPr lang="en-US" sz="2000" dirty="0" err="1">
-                <a:solidFill>
-                  <a:schemeClr val="accent6">
-                    <a:lumMod val="60000"/>
-                    <a:lumOff val="40000"/>
-                  </a:schemeClr>
-                </a:solidFill>
-              </a:rPr>
-              <a:t>venv</a:t>
-            </a:r>
-            <a:r>
-              <a:rPr lang="en-US" sz="2000" dirty="0">
-                <a:solidFill>
-                  <a:schemeClr val="accent6">
-                    <a:lumMod val="60000"/>
-                    <a:lumOff val="40000"/>
-                  </a:schemeClr>
-                </a:solidFill>
-              </a:rPr>
-              <a:t>\Scripts\python.exe –m pip install tabulate</a:t>
-            </a:r>
-          </a:p>
-          <a:p>
-            <a:r>
-              <a:rPr lang="en-US" sz="2400" b="1" u="sng" dirty="0">
-                <a:solidFill>
-                  <a:schemeClr val="accent6">
-                    <a:lumMod val="60000"/>
-                    <a:lumOff val="40000"/>
-                  </a:schemeClr>
-                </a:solidFill>
-              </a:rPr>
-              <a:t>Restart the Kernel (To be Safe)</a:t>
-            </a:r>
-          </a:p>
-          <a:p>
-            <a:br>
-              <a:rPr lang="en-US" sz="2400" dirty="0">
-                <a:solidFill>
-                  <a:schemeClr val="accent6">
-                    <a:lumMod val="60000"/>
-                    <a:lumOff val="40000"/>
-                  </a:schemeClr>
-                </a:solidFill>
-              </a:rPr>
-            </a:br>
-            <a:endParaRPr lang="en-US" sz="2400" dirty="0">
-              <a:solidFill>
-                <a:schemeClr val="accent6">
-                  <a:lumMod val="60000"/>
-                  <a:lumOff val="40000"/>
-                </a:schemeClr>
-              </a:solidFill>
-            </a:endParaRPr>
-          </a:p>
-        </p:txBody>
-      </p:sp>
-    </p:spTree>
-    <p:extLst>
-      <p:ext uri="{BB962C8B-B14F-4D97-AF65-F5344CB8AC3E}">
-        <p14:creationId xmlns:p14="http://schemas.microsoft.com/office/powerpoint/2010/main" val="3837488359"/>
       </p:ext>
     </p:extLst>
   </p:cSld>
@@ -5460,10 +5018,10 @@
       </p:grpSpPr>
       <p:pic>
         <p:nvPicPr>
-          <p:cNvPr id="7" name="Picture 6">
-            <a:extLst>
-              <a:ext uri="{FF2B5EF4-FFF2-40B4-BE49-F238E27FC236}">
-                <a16:creationId xmlns:a16="http://schemas.microsoft.com/office/drawing/2014/main" id="{AF3A50EE-D5B3-9EAF-CB2B-8A5CED4DDB36}"/>
+          <p:cNvPr id="3" name="Picture 2">
+            <a:extLst>
+              <a:ext uri="{FF2B5EF4-FFF2-40B4-BE49-F238E27FC236}">
+                <a16:creationId xmlns:a16="http://schemas.microsoft.com/office/drawing/2014/main" id="{339BD61A-D9E6-9698-656C-E321452B1B9B}"/>
               </a:ext>
             </a:extLst>
           </p:cNvPr>
@@ -5473,15 +5031,57 @@
           <p:nvPr/>
         </p:nvPicPr>
         <p:blipFill>
-          <a:blip r:embed="rId2"/>
+          <a:blip r:embed="rId2">
+            <a:extLst>
+              <a:ext uri="{28A0092B-C50C-407E-A947-70E740481C1C}">
+                <a14:useLocalDpi xmlns:a14="http://schemas.microsoft.com/office/drawing/2010/main" val="0"/>
+              </a:ext>
+            </a:extLst>
+          </a:blip>
           <a:stretch>
             <a:fillRect/>
           </a:stretch>
         </p:blipFill>
         <p:spPr>
           <a:xfrm>
-            <a:off x="0" y="841435"/>
-            <a:ext cx="12192000" cy="5358010"/>
+            <a:off x="73151" y="0"/>
+            <a:ext cx="7848697" cy="6187517"/>
+          </a:xfrm>
+          <a:prstGeom prst="rect">
+            <a:avLst/>
+          </a:prstGeom>
+        </p:spPr>
+      </p:pic>
+      <p:pic>
+        <p:nvPicPr>
+          <p:cNvPr id="4" name="Picture 3">
+            <a:extLst>
+              <a:ext uri="{FF2B5EF4-FFF2-40B4-BE49-F238E27FC236}">
+                <a16:creationId xmlns:a16="http://schemas.microsoft.com/office/drawing/2014/main" id="{CC8A50FB-1344-1D22-5E3D-392B976FF3E4}"/>
+              </a:ext>
+            </a:extLst>
+          </p:cNvPr>
+          <p:cNvPicPr>
+            <a:picLocks noChangeAspect="1"/>
+          </p:cNvPicPr>
+          <p:nvPr/>
+        </p:nvPicPr>
+        <p:blipFill>
+          <a:blip r:embed="rId3">
+            <a:extLst>
+              <a:ext uri="{28A0092B-C50C-407E-A947-70E740481C1C}">
+                <a14:useLocalDpi xmlns:a14="http://schemas.microsoft.com/office/drawing/2010/main" val="0"/>
+              </a:ext>
+            </a:extLst>
+          </a:blip>
+          <a:stretch>
+            <a:fillRect/>
+          </a:stretch>
+        </p:blipFill>
+        <p:spPr>
+          <a:xfrm>
+            <a:off x="8238145" y="2423160"/>
+            <a:ext cx="3542376" cy="4288535"/>
           </a:xfrm>
           <a:prstGeom prst="rect">
             <a:avLst/>
@@ -5509,7 +5109,7 @@
         <p:cNvPr id="1" name="">
           <a:extLst>
             <a:ext uri="{FF2B5EF4-FFF2-40B4-BE49-F238E27FC236}">
-              <a16:creationId xmlns:a16="http://schemas.microsoft.com/office/drawing/2014/main" id="{2A083885-9D0F-5455-69EE-ABCD9A4E2CA0}"/>
+              <a16:creationId xmlns:a16="http://schemas.microsoft.com/office/drawing/2014/main" id="{225BB553-7713-5917-7730-B21FFDA632AC}"/>
             </a:ext>
           </a:extLst>
         </p:cNvPr>
@@ -5524,172 +5124,256 @@
           <a:chExt cx="0" cy="0"/>
         </a:xfrm>
       </p:grpSpPr>
-      <p:sp>
-        <p:nvSpPr>
-          <p:cNvPr id="2" name="Title 1">
-            <a:extLst>
-              <a:ext uri="{FF2B5EF4-FFF2-40B4-BE49-F238E27FC236}">
-                <a16:creationId xmlns:a16="http://schemas.microsoft.com/office/drawing/2014/main" id="{5B9414CA-3B14-8680-6417-43833CC7AC99}"/>
-              </a:ext>
-            </a:extLst>
-          </p:cNvPr>
-          <p:cNvSpPr>
-            <a:spLocks noGrp="1"/>
-          </p:cNvSpPr>
-          <p:nvPr>
-            <p:ph type="title"/>
-          </p:nvPr>
-        </p:nvSpPr>
+      <p:pic>
+        <p:nvPicPr>
+          <p:cNvPr id="6" name="Picture 5">
+            <a:extLst>
+              <a:ext uri="{FF2B5EF4-FFF2-40B4-BE49-F238E27FC236}">
+                <a16:creationId xmlns:a16="http://schemas.microsoft.com/office/drawing/2014/main" id="{EE634FFC-6D31-A3B0-3E9A-94A92C99289A}"/>
+              </a:ext>
+            </a:extLst>
+          </p:cNvPr>
+          <p:cNvPicPr>
+            <a:picLocks noChangeAspect="1"/>
+          </p:cNvPicPr>
+          <p:nvPr/>
+        </p:nvPicPr>
+        <p:blipFill>
+          <a:blip r:embed="rId2">
+            <a:extLst>
+              <a:ext uri="{28A0092B-C50C-407E-A947-70E740481C1C}">
+                <a14:useLocalDpi xmlns:a14="http://schemas.microsoft.com/office/drawing/2010/main" val="0"/>
+              </a:ext>
+            </a:extLst>
+          </a:blip>
+          <a:stretch>
+            <a:fillRect/>
+          </a:stretch>
+        </p:blipFill>
         <p:spPr>
           <a:xfrm>
-            <a:off x="274320" y="136525"/>
-            <a:ext cx="11466576" cy="832739"/>
-          </a:xfrm>
-        </p:spPr>
-        <p:txBody>
-          <a:bodyPr>
-            <a:normAutofit/>
-          </a:bodyPr>
-          <a:lstStyle/>
-          <a:p>
-            <a:r>
-              <a:rPr lang="en-US" sz="3600" dirty="0"/>
-              <a:t>EXTRA</a:t>
-            </a:r>
-          </a:p>
-        </p:txBody>
-      </p:sp>
-      <p:sp>
-        <p:nvSpPr>
-          <p:cNvPr id="4" name="TextBox 3">
-            <a:extLst>
-              <a:ext uri="{FF2B5EF4-FFF2-40B4-BE49-F238E27FC236}">
-                <a16:creationId xmlns:a16="http://schemas.microsoft.com/office/drawing/2014/main" id="{B1A4303D-39C9-513F-ECDF-4C39F5338C5F}"/>
-              </a:ext>
-            </a:extLst>
-          </p:cNvPr>
-          <p:cNvSpPr txBox="1"/>
-          <p:nvPr/>
-        </p:nvSpPr>
-        <p:spPr>
-          <a:xfrm>
-            <a:off x="274320" y="933117"/>
-            <a:ext cx="11658600" cy="1477328"/>
+            <a:off x="3621024" y="1038460"/>
+            <a:ext cx="5150759" cy="4980204"/>
           </a:xfrm>
           <a:prstGeom prst="rect">
             <a:avLst/>
           </a:prstGeom>
-          <a:noFill/>
         </p:spPr>
-        <p:txBody>
-          <a:bodyPr wrap="square">
-            <a:spAutoFit/>
-          </a:bodyPr>
-          <a:lstStyle/>
-          <a:p>
-            <a:pPr marL="0" indent="0">
-              <a:buNone/>
-            </a:pPr>
-            <a:r>
-              <a:rPr lang="en-US" dirty="0" err="1">
-                <a:solidFill>
-                  <a:schemeClr val="accent6">
-                    <a:lumMod val="60000"/>
-                    <a:lumOff val="40000"/>
-                  </a:schemeClr>
-                </a:solidFill>
-              </a:rPr>
-              <a:t>Ffnbksdfd</a:t>
-            </a:r>
-            <a:endParaRPr lang="en-US" dirty="0">
-              <a:solidFill>
-                <a:schemeClr val="accent6">
-                  <a:lumMod val="60000"/>
-                  <a:lumOff val="40000"/>
-                </a:schemeClr>
-              </a:solidFill>
-            </a:endParaRPr>
-          </a:p>
-          <a:p>
-            <a:pPr marL="0" indent="0">
-              <a:buNone/>
-            </a:pPr>
-            <a:r>
-              <a:rPr lang="en-US" dirty="0" err="1">
-                <a:solidFill>
-                  <a:schemeClr val="accent6">
-                    <a:lumMod val="60000"/>
-                    <a:lumOff val="40000"/>
-                  </a:schemeClr>
-                </a:solidFill>
-              </a:rPr>
-              <a:t>Fdslj;f</a:t>
-            </a:r>
-            <a:endParaRPr lang="en-US" dirty="0">
-              <a:solidFill>
-                <a:schemeClr val="accent6">
-                  <a:lumMod val="60000"/>
-                  <a:lumOff val="40000"/>
-                </a:schemeClr>
-              </a:solidFill>
-            </a:endParaRPr>
-          </a:p>
-          <a:p>
-            <a:pPr marL="0" indent="0">
-              <a:buNone/>
-            </a:pPr>
-            <a:endParaRPr lang="en-US" dirty="0">
-              <a:solidFill>
-                <a:schemeClr val="accent6">
-                  <a:lumMod val="60000"/>
-                  <a:lumOff val="40000"/>
-                </a:schemeClr>
-              </a:solidFill>
-            </a:endParaRPr>
-          </a:p>
-          <a:p>
-            <a:pPr marL="0" indent="0">
-              <a:buNone/>
-            </a:pPr>
-            <a:r>
-              <a:rPr lang="en-US" dirty="0" err="1">
-                <a:solidFill>
-                  <a:schemeClr val="accent6">
-                    <a:lumMod val="60000"/>
-                    <a:lumOff val="40000"/>
-                  </a:schemeClr>
-                </a:solidFill>
-              </a:rPr>
-              <a:t>Fl;ds</a:t>
-            </a:r>
-            <a:endParaRPr lang="en-US" dirty="0">
-              <a:solidFill>
-                <a:schemeClr val="accent6">
-                  <a:lumMod val="60000"/>
-                  <a:lumOff val="40000"/>
-                </a:schemeClr>
-              </a:solidFill>
-            </a:endParaRPr>
-          </a:p>
-          <a:p>
-            <a:pPr marL="0" indent="0">
-              <a:buNone/>
-            </a:pPr>
-            <a:endParaRPr lang="en-US" dirty="0">
-              <a:solidFill>
-                <a:schemeClr val="accent6">
-                  <a:lumMod val="60000"/>
-                  <a:lumOff val="40000"/>
-                </a:schemeClr>
-              </a:solidFill>
-            </a:endParaRPr>
-          </a:p>
-        </p:txBody>
-      </p:sp>
+      </p:pic>
     </p:spTree>
     <p:extLst>
       <p:ext uri="{BB962C8B-B14F-4D97-AF65-F5344CB8AC3E}">
-        <p14:creationId xmlns:p14="http://schemas.microsoft.com/office/powerpoint/2010/main" val="3733026399"/>
+        <p14:creationId xmlns:p14="http://schemas.microsoft.com/office/powerpoint/2010/main" val="3618544679"/>
+      </p:ext>
+    </p:extLst>
+  </p:cSld>
+  <p:clrMapOvr>
+    <a:masterClrMapping/>
+  </p:clrMapOvr>
+</p:sld>
+</file>
+
+<file path=ppt/slides/slide7.xml><?xml version="1.0" encoding="utf-8"?>
+<p:sld xmlns:a="http://schemas.openxmlformats.org/drawingml/2006/main" xmlns:r="http://schemas.openxmlformats.org/officeDocument/2006/relationships" xmlns:p="http://schemas.openxmlformats.org/presentationml/2006/main">
+  <p:cSld>
+    <p:spTree>
+      <p:nvGrpSpPr>
+        <p:cNvPr id="1" name="">
+          <a:extLst>
+            <a:ext uri="{FF2B5EF4-FFF2-40B4-BE49-F238E27FC236}">
+              <a16:creationId xmlns:a16="http://schemas.microsoft.com/office/drawing/2014/main" id="{96C10CE8-1006-AEAF-56D1-664A2762E245}"/>
+            </a:ext>
+          </a:extLst>
+        </p:cNvPr>
+        <p:cNvGrpSpPr/>
+        <p:nvPr/>
+      </p:nvGrpSpPr>
+      <p:grpSpPr>
+        <a:xfrm>
+          <a:off x="0" y="0"/>
+          <a:ext cx="0" cy="0"/>
+          <a:chOff x="0" y="0"/>
+          <a:chExt cx="0" cy="0"/>
+        </a:xfrm>
+      </p:grpSpPr>
+      <p:pic>
+        <p:nvPicPr>
+          <p:cNvPr id="5" name="Picture 4">
+            <a:extLst>
+              <a:ext uri="{FF2B5EF4-FFF2-40B4-BE49-F238E27FC236}">
+                <a16:creationId xmlns:a16="http://schemas.microsoft.com/office/drawing/2014/main" id="{989446F3-30F5-5BD8-0270-0C29EE1FAA43}"/>
+              </a:ext>
+            </a:extLst>
+          </p:cNvPr>
+          <p:cNvPicPr>
+            <a:picLocks noChangeAspect="1"/>
+          </p:cNvPicPr>
+          <p:nvPr/>
+        </p:nvPicPr>
+        <p:blipFill>
+          <a:blip r:embed="rId2"/>
+          <a:stretch>
+            <a:fillRect/>
+          </a:stretch>
+        </p:blipFill>
+        <p:spPr>
+          <a:xfrm>
+            <a:off x="1261388" y="528232"/>
+            <a:ext cx="9669224" cy="5801535"/>
+          </a:xfrm>
+          <a:prstGeom prst="rect">
+            <a:avLst/>
+          </a:prstGeom>
+        </p:spPr>
+      </p:pic>
+    </p:spTree>
+    <p:extLst>
+      <p:ext uri="{BB962C8B-B14F-4D97-AF65-F5344CB8AC3E}">
+        <p14:creationId xmlns:p14="http://schemas.microsoft.com/office/powerpoint/2010/main" val="759007421"/>
+      </p:ext>
+    </p:extLst>
+  </p:cSld>
+  <p:clrMapOvr>
+    <a:masterClrMapping/>
+  </p:clrMapOvr>
+</p:sld>
+</file>
+
+<file path=ppt/slides/slide8.xml><?xml version="1.0" encoding="utf-8"?>
+<p:sld xmlns:a="http://schemas.openxmlformats.org/drawingml/2006/main" xmlns:r="http://schemas.openxmlformats.org/officeDocument/2006/relationships" xmlns:p="http://schemas.openxmlformats.org/presentationml/2006/main">
+  <p:cSld>
+    <p:spTree>
+      <p:nvGrpSpPr>
+        <p:cNvPr id="1" name="">
+          <a:extLst>
+            <a:ext uri="{FF2B5EF4-FFF2-40B4-BE49-F238E27FC236}">
+              <a16:creationId xmlns:a16="http://schemas.microsoft.com/office/drawing/2014/main" id="{63434D66-BD59-89A3-65B1-4B239BFA706B}"/>
+            </a:ext>
+          </a:extLst>
+        </p:cNvPr>
+        <p:cNvGrpSpPr/>
+        <p:nvPr/>
+      </p:nvGrpSpPr>
+      <p:grpSpPr>
+        <a:xfrm>
+          <a:off x="0" y="0"/>
+          <a:ext cx="0" cy="0"/>
+          <a:chOff x="0" y="0"/>
+          <a:chExt cx="0" cy="0"/>
+        </a:xfrm>
+      </p:grpSpPr>
+      <p:pic>
+        <p:nvPicPr>
+          <p:cNvPr id="3" name="Picture 2">
+            <a:extLst>
+              <a:ext uri="{FF2B5EF4-FFF2-40B4-BE49-F238E27FC236}">
+                <a16:creationId xmlns:a16="http://schemas.microsoft.com/office/drawing/2014/main" id="{D79738E8-4F76-6D99-9D95-6881DCFDF3E3}"/>
+              </a:ext>
+            </a:extLst>
+          </p:cNvPr>
+          <p:cNvPicPr>
+            <a:picLocks noChangeAspect="1"/>
+          </p:cNvPicPr>
+          <p:nvPr/>
+        </p:nvPicPr>
+        <p:blipFill>
+          <a:blip r:embed="rId2">
+            <a:extLst>
+              <a:ext uri="{28A0092B-C50C-407E-A947-70E740481C1C}">
+                <a14:useLocalDpi xmlns:a14="http://schemas.microsoft.com/office/drawing/2010/main" val="0"/>
+              </a:ext>
+            </a:extLst>
+          </a:blip>
+          <a:stretch>
+            <a:fillRect/>
+          </a:stretch>
+        </p:blipFill>
+        <p:spPr>
+          <a:xfrm>
+            <a:off x="3362808" y="242316"/>
+            <a:ext cx="5923584" cy="6373368"/>
+          </a:xfrm>
+          <a:prstGeom prst="rect">
+            <a:avLst/>
+          </a:prstGeom>
+        </p:spPr>
+      </p:pic>
+    </p:spTree>
+    <p:extLst>
+      <p:ext uri="{BB962C8B-B14F-4D97-AF65-F5344CB8AC3E}">
+        <p14:creationId xmlns:p14="http://schemas.microsoft.com/office/powerpoint/2010/main" val="4249795866"/>
+      </p:ext>
+    </p:extLst>
+  </p:cSld>
+  <p:clrMapOvr>
+    <a:masterClrMapping/>
+  </p:clrMapOvr>
+</p:sld>
+</file>
+
+<file path=ppt/slides/slide9.xml><?xml version="1.0" encoding="utf-8"?>
+<p:sld xmlns:a="http://schemas.openxmlformats.org/drawingml/2006/main" xmlns:r="http://schemas.openxmlformats.org/officeDocument/2006/relationships" xmlns:p="http://schemas.openxmlformats.org/presentationml/2006/main">
+  <p:cSld>
+    <p:spTree>
+      <p:nvGrpSpPr>
+        <p:cNvPr id="1" name="">
+          <a:extLst>
+            <a:ext uri="{FF2B5EF4-FFF2-40B4-BE49-F238E27FC236}">
+              <a16:creationId xmlns:a16="http://schemas.microsoft.com/office/drawing/2014/main" id="{30FF7CDE-0BDC-B712-0858-4AC853B48C04}"/>
+            </a:ext>
+          </a:extLst>
+        </p:cNvPr>
+        <p:cNvGrpSpPr/>
+        <p:nvPr/>
+      </p:nvGrpSpPr>
+      <p:grpSpPr>
+        <a:xfrm>
+          <a:off x="0" y="0"/>
+          <a:ext cx="0" cy="0"/>
+          <a:chOff x="0" y="0"/>
+          <a:chExt cx="0" cy="0"/>
+        </a:xfrm>
+      </p:grpSpPr>
+      <p:pic>
+        <p:nvPicPr>
+          <p:cNvPr id="4" name="Picture 3">
+            <a:extLst>
+              <a:ext uri="{FF2B5EF4-FFF2-40B4-BE49-F238E27FC236}">
+                <a16:creationId xmlns:a16="http://schemas.microsoft.com/office/drawing/2014/main" id="{65891161-3C6A-06A3-A80C-0B92DB0D7161}"/>
+              </a:ext>
+            </a:extLst>
+          </p:cNvPr>
+          <p:cNvPicPr>
+            <a:picLocks noChangeAspect="1"/>
+          </p:cNvPicPr>
+          <p:nvPr/>
+        </p:nvPicPr>
+        <p:blipFill>
+          <a:blip r:embed="rId2">
+            <a:extLst>
+              <a:ext uri="{28A0092B-C50C-407E-A947-70E740481C1C}">
+                <a14:useLocalDpi xmlns:a14="http://schemas.microsoft.com/office/drawing/2010/main" val="0"/>
+              </a:ext>
+            </a:extLst>
+          </a:blip>
+          <a:stretch>
+            <a:fillRect/>
+          </a:stretch>
+        </p:blipFill>
+        <p:spPr>
+          <a:xfrm>
+            <a:off x="1921228" y="571349"/>
+            <a:ext cx="8349543" cy="6117487"/>
+          </a:xfrm>
+          <a:prstGeom prst="rect">
+            <a:avLst/>
+          </a:prstGeom>
+        </p:spPr>
+      </p:pic>
+    </p:spTree>
+    <p:extLst>
+      <p:ext uri="{BB962C8B-B14F-4D97-AF65-F5344CB8AC3E}">
+        <p14:creationId xmlns:p14="http://schemas.microsoft.com/office/powerpoint/2010/main" val="1408361507"/>
       </p:ext>
     </p:extLst>
   </p:cSld>
